--- a/神大愛(崇拜版).pptx
+++ b/神大愛(崇拜版).pptx
@@ -167,7 +167,7 @@
           <a:lstStyle/>
           <a:p>
             <a:r>
-              <a:rPr lang="en-US" altLang="zh-TW" smtClean="0"/>
+              <a:rPr lang="en-US" altLang="zh-TW"/>
               <a:t>Click to edit Master title style</a:t>
             </a:r>
             <a:endParaRPr lang="zh-TW" altLang="en-US"/>
@@ -286,7 +286,7 @@
           </a:lstStyle>
           <a:p>
             <a:r>
-              <a:rPr lang="en-US" altLang="zh-TW" smtClean="0"/>
+              <a:rPr lang="en-US" altLang="zh-TW"/>
               <a:t>Click to edit Master subtitle style</a:t>
             </a:r>
             <a:endParaRPr lang="zh-TW" altLang="en-US"/>
@@ -310,7 +310,7 @@
           <a:p>
             <a:fld id="{AB55ABB3-4662-401A-B868-CB91799AF64C}" type="datetimeFigureOut">
               <a:rPr lang="zh-TW" altLang="en-US" smtClean="0"/>
-              <a:t>2023/10/7</a:t>
+              <a:t>2024/11/9</a:t>
             </a:fld>
             <a:endParaRPr lang="zh-TW" altLang="en-US"/>
           </a:p>
@@ -404,7 +404,7 @@
           <a:lstStyle/>
           <a:p>
             <a:r>
-              <a:rPr lang="en-US" altLang="zh-TW" smtClean="0"/>
+              <a:rPr lang="en-US" altLang="zh-TW"/>
               <a:t>Click to edit Master title style</a:t>
             </a:r>
             <a:endParaRPr lang="zh-TW" altLang="en-US"/>
@@ -428,35 +428,35 @@
           <a:p>
             <a:pPr lvl="0"/>
             <a:r>
-              <a:rPr lang="en-US" altLang="zh-TW" smtClean="0"/>
+              <a:rPr lang="en-US" altLang="zh-TW"/>
               <a:t>Edit Master text styles</a:t>
             </a:r>
           </a:p>
           <a:p>
             <a:pPr lvl="1"/>
             <a:r>
-              <a:rPr lang="en-US" altLang="zh-TW" smtClean="0"/>
+              <a:rPr lang="en-US" altLang="zh-TW"/>
               <a:t>Second level</a:t>
             </a:r>
           </a:p>
           <a:p>
             <a:pPr lvl="2"/>
             <a:r>
-              <a:rPr lang="en-US" altLang="zh-TW" smtClean="0"/>
+              <a:rPr lang="en-US" altLang="zh-TW"/>
               <a:t>Third level</a:t>
             </a:r>
           </a:p>
           <a:p>
             <a:pPr lvl="3"/>
             <a:r>
-              <a:rPr lang="en-US" altLang="zh-TW" smtClean="0"/>
+              <a:rPr lang="en-US" altLang="zh-TW"/>
               <a:t>Fourth level</a:t>
             </a:r>
           </a:p>
           <a:p>
             <a:pPr lvl="4"/>
             <a:r>
-              <a:rPr lang="en-US" altLang="zh-TW" smtClean="0"/>
+              <a:rPr lang="en-US" altLang="zh-TW"/>
               <a:t>Fifth level</a:t>
             </a:r>
             <a:endParaRPr lang="zh-TW" altLang="en-US"/>
@@ -480,7 +480,7 @@
           <a:p>
             <a:fld id="{AB55ABB3-4662-401A-B868-CB91799AF64C}" type="datetimeFigureOut">
               <a:rPr lang="zh-TW" altLang="en-US" smtClean="0"/>
-              <a:t>2023/10/7</a:t>
+              <a:t>2024/11/9</a:t>
             </a:fld>
             <a:endParaRPr lang="zh-TW" altLang="en-US"/>
           </a:p>
@@ -579,7 +579,7 @@
           <a:lstStyle/>
           <a:p>
             <a:r>
-              <a:rPr lang="en-US" altLang="zh-TW" smtClean="0"/>
+              <a:rPr lang="en-US" altLang="zh-TW"/>
               <a:t>Click to edit Master title style</a:t>
             </a:r>
             <a:endParaRPr lang="zh-TW" altLang="en-US"/>
@@ -608,35 +608,35 @@
           <a:p>
             <a:pPr lvl="0"/>
             <a:r>
-              <a:rPr lang="en-US" altLang="zh-TW" smtClean="0"/>
+              <a:rPr lang="en-US" altLang="zh-TW"/>
               <a:t>Edit Master text styles</a:t>
             </a:r>
           </a:p>
           <a:p>
             <a:pPr lvl="1"/>
             <a:r>
-              <a:rPr lang="en-US" altLang="zh-TW" smtClean="0"/>
+              <a:rPr lang="en-US" altLang="zh-TW"/>
               <a:t>Second level</a:t>
             </a:r>
           </a:p>
           <a:p>
             <a:pPr lvl="2"/>
             <a:r>
-              <a:rPr lang="en-US" altLang="zh-TW" smtClean="0"/>
+              <a:rPr lang="en-US" altLang="zh-TW"/>
               <a:t>Third level</a:t>
             </a:r>
           </a:p>
           <a:p>
             <a:pPr lvl="3"/>
             <a:r>
-              <a:rPr lang="en-US" altLang="zh-TW" smtClean="0"/>
+              <a:rPr lang="en-US" altLang="zh-TW"/>
               <a:t>Fourth level</a:t>
             </a:r>
           </a:p>
           <a:p>
             <a:pPr lvl="4"/>
             <a:r>
-              <a:rPr lang="en-US" altLang="zh-TW" smtClean="0"/>
+              <a:rPr lang="en-US" altLang="zh-TW"/>
               <a:t>Fifth level</a:t>
             </a:r>
             <a:endParaRPr lang="zh-TW" altLang="en-US"/>
@@ -660,7 +660,7 @@
           <a:p>
             <a:fld id="{AB55ABB3-4662-401A-B868-CB91799AF64C}" type="datetimeFigureOut">
               <a:rPr lang="zh-TW" altLang="en-US" smtClean="0"/>
-              <a:t>2023/10/7</a:t>
+              <a:t>2024/11/9</a:t>
             </a:fld>
             <a:endParaRPr lang="zh-TW" altLang="en-US"/>
           </a:p>
@@ -754,7 +754,7 @@
           <a:lstStyle/>
           <a:p>
             <a:r>
-              <a:rPr lang="en-US" altLang="zh-TW" smtClean="0"/>
+              <a:rPr lang="en-US" altLang="zh-TW"/>
               <a:t>Click to edit Master title style</a:t>
             </a:r>
             <a:endParaRPr lang="zh-TW" altLang="en-US"/>
@@ -778,35 +778,35 @@
           <a:p>
             <a:pPr lvl="0"/>
             <a:r>
-              <a:rPr lang="en-US" altLang="zh-TW" smtClean="0"/>
+              <a:rPr lang="en-US" altLang="zh-TW"/>
               <a:t>Edit Master text styles</a:t>
             </a:r>
           </a:p>
           <a:p>
             <a:pPr lvl="1"/>
             <a:r>
-              <a:rPr lang="en-US" altLang="zh-TW" smtClean="0"/>
+              <a:rPr lang="en-US" altLang="zh-TW"/>
               <a:t>Second level</a:t>
             </a:r>
           </a:p>
           <a:p>
             <a:pPr lvl="2"/>
             <a:r>
-              <a:rPr lang="en-US" altLang="zh-TW" smtClean="0"/>
+              <a:rPr lang="en-US" altLang="zh-TW"/>
               <a:t>Third level</a:t>
             </a:r>
           </a:p>
           <a:p>
             <a:pPr lvl="3"/>
             <a:r>
-              <a:rPr lang="en-US" altLang="zh-TW" smtClean="0"/>
+              <a:rPr lang="en-US" altLang="zh-TW"/>
               <a:t>Fourth level</a:t>
             </a:r>
           </a:p>
           <a:p>
             <a:pPr lvl="4"/>
             <a:r>
-              <a:rPr lang="en-US" altLang="zh-TW" smtClean="0"/>
+              <a:rPr lang="en-US" altLang="zh-TW"/>
               <a:t>Fifth level</a:t>
             </a:r>
             <a:endParaRPr lang="zh-TW" altLang="en-US"/>
@@ -830,7 +830,7 @@
           <a:p>
             <a:fld id="{AB55ABB3-4662-401A-B868-CB91799AF64C}" type="datetimeFigureOut">
               <a:rPr lang="zh-TW" altLang="en-US" smtClean="0"/>
-              <a:t>2023/10/7</a:t>
+              <a:t>2024/11/9</a:t>
             </a:fld>
             <a:endParaRPr lang="zh-TW" altLang="en-US"/>
           </a:p>
@@ -933,7 +933,7 @@
           </a:lstStyle>
           <a:p>
             <a:r>
-              <a:rPr lang="en-US" altLang="zh-TW" smtClean="0"/>
+              <a:rPr lang="en-US" altLang="zh-TW"/>
               <a:t>Click to edit Master title style</a:t>
             </a:r>
             <a:endParaRPr lang="zh-TW" altLang="en-US"/>
@@ -1053,7 +1053,7 @@
           <a:p>
             <a:pPr lvl="0"/>
             <a:r>
-              <a:rPr lang="en-US" altLang="zh-TW" smtClean="0"/>
+              <a:rPr lang="en-US" altLang="zh-TW"/>
               <a:t>Edit Master text styles</a:t>
             </a:r>
           </a:p>
@@ -1076,7 +1076,7 @@
           <a:p>
             <a:fld id="{AB55ABB3-4662-401A-B868-CB91799AF64C}" type="datetimeFigureOut">
               <a:rPr lang="zh-TW" altLang="en-US" smtClean="0"/>
-              <a:t>2023/10/7</a:t>
+              <a:t>2024/11/9</a:t>
             </a:fld>
             <a:endParaRPr lang="zh-TW" altLang="en-US"/>
           </a:p>
@@ -1170,7 +1170,7 @@
           <a:lstStyle/>
           <a:p>
             <a:r>
-              <a:rPr lang="en-US" altLang="zh-TW" smtClean="0"/>
+              <a:rPr lang="en-US" altLang="zh-TW"/>
               <a:t>Click to edit Master title style</a:t>
             </a:r>
             <a:endParaRPr lang="zh-TW" altLang="en-US"/>
@@ -1227,35 +1227,35 @@
           <a:p>
             <a:pPr lvl="0"/>
             <a:r>
-              <a:rPr lang="en-US" altLang="zh-TW" smtClean="0"/>
+              <a:rPr lang="en-US" altLang="zh-TW"/>
               <a:t>Edit Master text styles</a:t>
             </a:r>
           </a:p>
           <a:p>
             <a:pPr lvl="1"/>
             <a:r>
-              <a:rPr lang="en-US" altLang="zh-TW" smtClean="0"/>
+              <a:rPr lang="en-US" altLang="zh-TW"/>
               <a:t>Second level</a:t>
             </a:r>
           </a:p>
           <a:p>
             <a:pPr lvl="2"/>
             <a:r>
-              <a:rPr lang="en-US" altLang="zh-TW" smtClean="0"/>
+              <a:rPr lang="en-US" altLang="zh-TW"/>
               <a:t>Third level</a:t>
             </a:r>
           </a:p>
           <a:p>
             <a:pPr lvl="3"/>
             <a:r>
-              <a:rPr lang="en-US" altLang="zh-TW" smtClean="0"/>
+              <a:rPr lang="en-US" altLang="zh-TW"/>
               <a:t>Fourth level</a:t>
             </a:r>
           </a:p>
           <a:p>
             <a:pPr lvl="4"/>
             <a:r>
-              <a:rPr lang="en-US" altLang="zh-TW" smtClean="0"/>
+              <a:rPr lang="en-US" altLang="zh-TW"/>
               <a:t>Fifth level</a:t>
             </a:r>
             <a:endParaRPr lang="zh-TW" altLang="en-US"/>
@@ -1312,35 +1312,35 @@
           <a:p>
             <a:pPr lvl="0"/>
             <a:r>
-              <a:rPr lang="en-US" altLang="zh-TW" smtClean="0"/>
+              <a:rPr lang="en-US" altLang="zh-TW"/>
               <a:t>Edit Master text styles</a:t>
             </a:r>
           </a:p>
           <a:p>
             <a:pPr lvl="1"/>
             <a:r>
-              <a:rPr lang="en-US" altLang="zh-TW" smtClean="0"/>
+              <a:rPr lang="en-US" altLang="zh-TW"/>
               <a:t>Second level</a:t>
             </a:r>
           </a:p>
           <a:p>
             <a:pPr lvl="2"/>
             <a:r>
-              <a:rPr lang="en-US" altLang="zh-TW" smtClean="0"/>
+              <a:rPr lang="en-US" altLang="zh-TW"/>
               <a:t>Third level</a:t>
             </a:r>
           </a:p>
           <a:p>
             <a:pPr lvl="3"/>
             <a:r>
-              <a:rPr lang="en-US" altLang="zh-TW" smtClean="0"/>
+              <a:rPr lang="en-US" altLang="zh-TW"/>
               <a:t>Fourth level</a:t>
             </a:r>
           </a:p>
           <a:p>
             <a:pPr lvl="4"/>
             <a:r>
-              <a:rPr lang="en-US" altLang="zh-TW" smtClean="0"/>
+              <a:rPr lang="en-US" altLang="zh-TW"/>
               <a:t>Fifth level</a:t>
             </a:r>
             <a:endParaRPr lang="zh-TW" altLang="en-US"/>
@@ -1364,7 +1364,7 @@
           <a:p>
             <a:fld id="{AB55ABB3-4662-401A-B868-CB91799AF64C}" type="datetimeFigureOut">
               <a:rPr lang="zh-TW" altLang="en-US" smtClean="0"/>
-              <a:t>2023/10/7</a:t>
+              <a:t>2024/11/9</a:t>
             </a:fld>
             <a:endParaRPr lang="zh-TW" altLang="en-US"/>
           </a:p>
@@ -1462,7 +1462,7 @@
           </a:lstStyle>
           <a:p>
             <a:r>
-              <a:rPr lang="en-US" altLang="zh-TW" smtClean="0"/>
+              <a:rPr lang="en-US" altLang="zh-TW"/>
               <a:t>Click to edit Master title style</a:t>
             </a:r>
             <a:endParaRPr lang="zh-TW" altLang="en-US"/>
@@ -1528,7 +1528,7 @@
           <a:p>
             <a:pPr lvl="0"/>
             <a:r>
-              <a:rPr lang="en-US" altLang="zh-TW" smtClean="0"/>
+              <a:rPr lang="en-US" altLang="zh-TW"/>
               <a:t>Edit Master text styles</a:t>
             </a:r>
           </a:p>
@@ -1584,35 +1584,35 @@
           <a:p>
             <a:pPr lvl="0"/>
             <a:r>
-              <a:rPr lang="en-US" altLang="zh-TW" smtClean="0"/>
+              <a:rPr lang="en-US" altLang="zh-TW"/>
               <a:t>Edit Master text styles</a:t>
             </a:r>
           </a:p>
           <a:p>
             <a:pPr lvl="1"/>
             <a:r>
-              <a:rPr lang="en-US" altLang="zh-TW" smtClean="0"/>
+              <a:rPr lang="en-US" altLang="zh-TW"/>
               <a:t>Second level</a:t>
             </a:r>
           </a:p>
           <a:p>
             <a:pPr lvl="2"/>
             <a:r>
-              <a:rPr lang="en-US" altLang="zh-TW" smtClean="0"/>
+              <a:rPr lang="en-US" altLang="zh-TW"/>
               <a:t>Third level</a:t>
             </a:r>
           </a:p>
           <a:p>
             <a:pPr lvl="3"/>
             <a:r>
-              <a:rPr lang="en-US" altLang="zh-TW" smtClean="0"/>
+              <a:rPr lang="en-US" altLang="zh-TW"/>
               <a:t>Fourth level</a:t>
             </a:r>
           </a:p>
           <a:p>
             <a:pPr lvl="4"/>
             <a:r>
-              <a:rPr lang="en-US" altLang="zh-TW" smtClean="0"/>
+              <a:rPr lang="en-US" altLang="zh-TW"/>
               <a:t>Fifth level</a:t>
             </a:r>
             <a:endParaRPr lang="zh-TW" altLang="en-US"/>
@@ -1678,7 +1678,7 @@
           <a:p>
             <a:pPr lvl="0"/>
             <a:r>
-              <a:rPr lang="en-US" altLang="zh-TW" smtClean="0"/>
+              <a:rPr lang="en-US" altLang="zh-TW"/>
               <a:t>Edit Master text styles</a:t>
             </a:r>
           </a:p>
@@ -1734,35 +1734,35 @@
           <a:p>
             <a:pPr lvl="0"/>
             <a:r>
-              <a:rPr lang="en-US" altLang="zh-TW" smtClean="0"/>
+              <a:rPr lang="en-US" altLang="zh-TW"/>
               <a:t>Edit Master text styles</a:t>
             </a:r>
           </a:p>
           <a:p>
             <a:pPr lvl="1"/>
             <a:r>
-              <a:rPr lang="en-US" altLang="zh-TW" smtClean="0"/>
+              <a:rPr lang="en-US" altLang="zh-TW"/>
               <a:t>Second level</a:t>
             </a:r>
           </a:p>
           <a:p>
             <a:pPr lvl="2"/>
             <a:r>
-              <a:rPr lang="en-US" altLang="zh-TW" smtClean="0"/>
+              <a:rPr lang="en-US" altLang="zh-TW"/>
               <a:t>Third level</a:t>
             </a:r>
           </a:p>
           <a:p>
             <a:pPr lvl="3"/>
             <a:r>
-              <a:rPr lang="en-US" altLang="zh-TW" smtClean="0"/>
+              <a:rPr lang="en-US" altLang="zh-TW"/>
               <a:t>Fourth level</a:t>
             </a:r>
           </a:p>
           <a:p>
             <a:pPr lvl="4"/>
             <a:r>
-              <a:rPr lang="en-US" altLang="zh-TW" smtClean="0"/>
+              <a:rPr lang="en-US" altLang="zh-TW"/>
               <a:t>Fifth level</a:t>
             </a:r>
             <a:endParaRPr lang="zh-TW" altLang="en-US"/>
@@ -1786,7 +1786,7 @@
           <a:p>
             <a:fld id="{AB55ABB3-4662-401A-B868-CB91799AF64C}" type="datetimeFigureOut">
               <a:rPr lang="zh-TW" altLang="en-US" smtClean="0"/>
-              <a:t>2023/10/7</a:t>
+              <a:t>2024/11/9</a:t>
             </a:fld>
             <a:endParaRPr lang="zh-TW" altLang="en-US"/>
           </a:p>
@@ -1880,7 +1880,7 @@
           <a:lstStyle/>
           <a:p>
             <a:r>
-              <a:rPr lang="en-US" altLang="zh-TW" smtClean="0"/>
+              <a:rPr lang="en-US" altLang="zh-TW"/>
               <a:t>Click to edit Master title style</a:t>
             </a:r>
             <a:endParaRPr lang="zh-TW" altLang="en-US"/>
@@ -1904,7 +1904,7 @@
           <a:p>
             <a:fld id="{AB55ABB3-4662-401A-B868-CB91799AF64C}" type="datetimeFigureOut">
               <a:rPr lang="zh-TW" altLang="en-US" smtClean="0"/>
-              <a:t>2023/10/7</a:t>
+              <a:t>2024/11/9</a:t>
             </a:fld>
             <a:endParaRPr lang="zh-TW" altLang="en-US"/>
           </a:p>
@@ -1999,7 +1999,7 @@
           <a:p>
             <a:fld id="{AB55ABB3-4662-401A-B868-CB91799AF64C}" type="datetimeFigureOut">
               <a:rPr lang="zh-TW" altLang="en-US" smtClean="0"/>
-              <a:t>2023/10/7</a:t>
+              <a:t>2024/11/9</a:t>
             </a:fld>
             <a:endParaRPr lang="zh-TW" altLang="en-US"/>
           </a:p>
@@ -2102,7 +2102,7 @@
           </a:lstStyle>
           <a:p>
             <a:r>
-              <a:rPr lang="en-US" altLang="zh-TW" smtClean="0"/>
+              <a:rPr lang="en-US" altLang="zh-TW"/>
               <a:t>Click to edit Master title style</a:t>
             </a:r>
             <a:endParaRPr lang="zh-TW" altLang="en-US"/>
@@ -2159,35 +2159,35 @@
           <a:p>
             <a:pPr lvl="0"/>
             <a:r>
-              <a:rPr lang="en-US" altLang="zh-TW" smtClean="0"/>
+              <a:rPr lang="en-US" altLang="zh-TW"/>
               <a:t>Edit Master text styles</a:t>
             </a:r>
           </a:p>
           <a:p>
             <a:pPr lvl="1"/>
             <a:r>
-              <a:rPr lang="en-US" altLang="zh-TW" smtClean="0"/>
+              <a:rPr lang="en-US" altLang="zh-TW"/>
               <a:t>Second level</a:t>
             </a:r>
           </a:p>
           <a:p>
             <a:pPr lvl="2"/>
             <a:r>
-              <a:rPr lang="en-US" altLang="zh-TW" smtClean="0"/>
+              <a:rPr lang="en-US" altLang="zh-TW"/>
               <a:t>Third level</a:t>
             </a:r>
           </a:p>
           <a:p>
             <a:pPr lvl="3"/>
             <a:r>
-              <a:rPr lang="en-US" altLang="zh-TW" smtClean="0"/>
+              <a:rPr lang="en-US" altLang="zh-TW"/>
               <a:t>Fourth level</a:t>
             </a:r>
           </a:p>
           <a:p>
             <a:pPr lvl="4"/>
             <a:r>
-              <a:rPr lang="en-US" altLang="zh-TW" smtClean="0"/>
+              <a:rPr lang="en-US" altLang="zh-TW"/>
               <a:t>Fifth level</a:t>
             </a:r>
             <a:endParaRPr lang="zh-TW" altLang="en-US"/>
@@ -2253,7 +2253,7 @@
           <a:p>
             <a:pPr lvl="0"/>
             <a:r>
-              <a:rPr lang="en-US" altLang="zh-TW" smtClean="0"/>
+              <a:rPr lang="en-US" altLang="zh-TW"/>
               <a:t>Edit Master text styles</a:t>
             </a:r>
           </a:p>
@@ -2276,7 +2276,7 @@
           <a:p>
             <a:fld id="{AB55ABB3-4662-401A-B868-CB91799AF64C}" type="datetimeFigureOut">
               <a:rPr lang="zh-TW" altLang="en-US" smtClean="0"/>
-              <a:t>2023/10/7</a:t>
+              <a:t>2024/11/9</a:t>
             </a:fld>
             <a:endParaRPr lang="zh-TW" altLang="en-US"/>
           </a:p>
@@ -2379,7 +2379,7 @@
           </a:lstStyle>
           <a:p>
             <a:r>
-              <a:rPr lang="en-US" altLang="zh-TW" smtClean="0"/>
+              <a:rPr lang="en-US" altLang="zh-TW"/>
               <a:t>Click to edit Master title style</a:t>
             </a:r>
             <a:endParaRPr lang="zh-TW" altLang="en-US"/>
@@ -2444,7 +2444,7 @@
           </a:lstStyle>
           <a:p>
             <a:r>
-              <a:rPr lang="en-US" altLang="zh-TW" smtClean="0"/>
+              <a:rPr lang="en-US" altLang="zh-TW"/>
               <a:t>Click icon to add picture</a:t>
             </a:r>
             <a:endParaRPr lang="zh-TW" altLang="en-US"/>
@@ -2510,7 +2510,7 @@
           <a:p>
             <a:pPr lvl="0"/>
             <a:r>
-              <a:rPr lang="en-US" altLang="zh-TW" smtClean="0"/>
+              <a:rPr lang="en-US" altLang="zh-TW"/>
               <a:t>Edit Master text styles</a:t>
             </a:r>
           </a:p>
@@ -2533,7 +2533,7 @@
           <a:p>
             <a:fld id="{AB55ABB3-4662-401A-B868-CB91799AF64C}" type="datetimeFigureOut">
               <a:rPr lang="zh-TW" altLang="en-US" smtClean="0"/>
-              <a:t>2023/10/7</a:t>
+              <a:t>2024/11/9</a:t>
             </a:fld>
             <a:endParaRPr lang="zh-TW" altLang="en-US"/>
           </a:p>
@@ -2647,10 +2647,9 @@
           <a:lstStyle/>
           <a:p>
             <a:r>
-              <a:rPr lang="zh-TW" altLang="en-US" smtClean="0"/>
+              <a:rPr lang="zh-TW" altLang="en-US"/>
               <a:t>按一下以編輯母片標題樣式</a:t>
             </a:r>
-            <a:endParaRPr lang="zh-TW" altLang="en-US"/>
           </a:p>
         </p:txBody>
       </p:sp>
@@ -2681,38 +2680,37 @@
           <a:p>
             <a:pPr lvl="0"/>
             <a:r>
-              <a:rPr lang="zh-TW" altLang="en-US" smtClean="0"/>
+              <a:rPr lang="zh-TW" altLang="en-US"/>
               <a:t>按一下以編輯母片文字樣式</a:t>
             </a:r>
           </a:p>
           <a:p>
             <a:pPr lvl="1"/>
             <a:r>
-              <a:rPr lang="zh-TW" altLang="en-US" smtClean="0"/>
+              <a:rPr lang="zh-TW" altLang="en-US"/>
               <a:t>第二層</a:t>
             </a:r>
           </a:p>
           <a:p>
             <a:pPr lvl="2"/>
             <a:r>
-              <a:rPr lang="zh-TW" altLang="en-US" smtClean="0"/>
+              <a:rPr lang="zh-TW" altLang="en-US"/>
               <a:t>第三層</a:t>
             </a:r>
           </a:p>
           <a:p>
             <a:pPr lvl="3"/>
             <a:r>
-              <a:rPr lang="zh-TW" altLang="en-US" smtClean="0"/>
+              <a:rPr lang="zh-TW" altLang="en-US"/>
               <a:t>第四層</a:t>
             </a:r>
           </a:p>
           <a:p>
             <a:pPr lvl="4"/>
             <a:r>
-              <a:rPr lang="zh-TW" altLang="en-US" smtClean="0"/>
+              <a:rPr lang="zh-TW" altLang="en-US"/>
               <a:t>第五層</a:t>
             </a:r>
-            <a:endParaRPr lang="zh-TW" altLang="en-US"/>
           </a:p>
         </p:txBody>
       </p:sp>
@@ -2751,7 +2749,7 @@
           <a:p>
             <a:fld id="{AB55ABB3-4662-401A-B868-CB91799AF64C}" type="datetimeFigureOut">
               <a:rPr lang="zh-TW" altLang="en-US" smtClean="0"/>
-              <a:t>2023/10/7</a:t>
+              <a:t>2024/11/9</a:t>
             </a:fld>
             <a:endParaRPr lang="zh-TW" altLang="en-US"/>
           </a:p>
@@ -3163,24 +3161,7 @@
                 <a:latin typeface="微軟正黑體" pitchFamily="34" charset="-120"/>
                 <a:ea typeface="微軟正黑體" pitchFamily="34" charset="-120"/>
               </a:rPr>
-              <a:t>神</a:t>
-            </a:r>
-            <a:r>
-              <a:rPr lang="zh-TW" altLang="en-US" sz="7200" b="1" i="1" dirty="0">
-                <a:solidFill>
-                  <a:srgbClr val="660033"/>
-                </a:solidFill>
-                <a:effectLst>
-                  <a:outerShdw blurRad="38100" dist="38100" dir="2700000" algn="tl">
-                    <a:srgbClr val="000000">
-                      <a:alpha val="43137"/>
-                    </a:srgbClr>
-                  </a:outerShdw>
-                </a:effectLst>
-                <a:latin typeface="微軟正黑體" pitchFamily="34" charset="-120"/>
-                <a:ea typeface="微軟正黑體" pitchFamily="34" charset="-120"/>
-              </a:rPr>
-              <a:t>大愛</a:t>
+              <a:t>神大愛</a:t>
             </a:r>
           </a:p>
         </p:txBody>
@@ -3317,7 +3298,7 @@
               <a:t>( </a:t>
             </a:r>
             <a:r>
-              <a:rPr lang="zh-CN" altLang="en-US" sz="3200" b="1" dirty="0" smtClean="0">
+              <a:rPr lang="zh-CN" altLang="en-US" sz="3200" b="1" dirty="0">
                 <a:solidFill>
                   <a:srgbClr val="660033"/>
                 </a:solidFill>
@@ -3325,10 +3306,10 @@
                 <a:latin typeface="Microsoft JhengHei" panose="020B0604030504040204" pitchFamily="34" charset="-120"/>
                 <a:ea typeface="Microsoft JhengHei" panose="020B0604030504040204" pitchFamily="34" charset="-120"/>
               </a:rPr>
-              <a:t>正</a:t>
-            </a:r>
-            <a:r>
-              <a:rPr lang="en-US" sz="3200" b="1" dirty="0" smtClean="0">
+              <a:t>正歌</a:t>
+            </a:r>
+            <a:r>
+              <a:rPr lang="en-US" sz="3200" b="1" dirty="0">
                 <a:solidFill>
                   <a:srgbClr val="660033"/>
                 </a:solidFill>
@@ -3336,18 +3317,7 @@
                 <a:latin typeface="Microsoft JhengHei" panose="020B0604030504040204" pitchFamily="34" charset="-120"/>
                 <a:ea typeface="Microsoft JhengHei" panose="020B0604030504040204" pitchFamily="34" charset="-120"/>
               </a:rPr>
-              <a:t> </a:t>
-            </a:r>
-            <a:r>
-              <a:rPr lang="en-US" sz="3200" b="1" dirty="0">
-                <a:solidFill>
-                  <a:srgbClr val="660033"/>
-                </a:solidFill>
-                <a:effectLst/>
-                <a:latin typeface="Microsoft JhengHei" panose="020B0604030504040204" pitchFamily="34" charset="-120"/>
-                <a:ea typeface="Microsoft JhengHei" panose="020B0604030504040204" pitchFamily="34" charset="-120"/>
-              </a:rPr>
-              <a:t>)</a:t>
+              <a:t> )</a:t>
             </a:r>
             <a:endParaRPr lang="vi-VN" sz="3200" b="1" dirty="0">
               <a:solidFill>
@@ -3437,7 +3407,7 @@
               <a:buNone/>
             </a:pPr>
             <a:r>
-              <a:rPr lang="zh-CN" altLang="en-US" sz="6600" b="1" dirty="0" smtClean="0">
+              <a:rPr lang="zh-CN" altLang="en-US" sz="6600" b="1" dirty="0">
                 <a:solidFill>
                   <a:srgbClr val="660033"/>
                 </a:solidFill>
@@ -3447,24 +3417,14 @@
               <a:t>祢</a:t>
             </a:r>
             <a:r>
-              <a:rPr lang="zh-TW" altLang="en-US" sz="6600" b="1" dirty="0" smtClean="0">
+              <a:rPr lang="zh-TW" altLang="en-US" sz="6600" b="1" dirty="0">
                 <a:solidFill>
                   <a:srgbClr val="660033"/>
                 </a:solidFill>
                 <a:latin typeface="微軟正黑體" pitchFamily="34" charset="-120"/>
                 <a:ea typeface="微軟正黑體" pitchFamily="34" charset="-120"/>
               </a:rPr>
-              <a:t>話</a:t>
-            </a:r>
-            <a:r>
-              <a:rPr lang="zh-TW" altLang="en-US" sz="6600" b="1" dirty="0">
-                <a:solidFill>
-                  <a:srgbClr val="660033"/>
-                </a:solidFill>
-                <a:latin typeface="微軟正黑體" pitchFamily="34" charset="-120"/>
-                <a:ea typeface="微軟正黑體" pitchFamily="34" charset="-120"/>
-              </a:rPr>
-              <a:t>語叫我永不動搖</a:t>
+              <a:t>話語叫我永不動搖</a:t>
             </a:r>
           </a:p>
         </p:txBody>
@@ -3497,6 +3457,7 @@
                 <a:solidFill>
                   <a:srgbClr val="660033"/>
                 </a:solidFill>
+                <a:effectLst/>
                 <a:latin typeface="Microsoft JhengHei" panose="020B0604030504040204" pitchFamily="34" charset="-120"/>
                 <a:ea typeface="Microsoft JhengHei" panose="020B0604030504040204" pitchFamily="34" charset="-120"/>
               </a:rPr>
@@ -3507,36 +3468,28 @@
                 <a:solidFill>
                   <a:srgbClr val="660033"/>
                 </a:solidFill>
+                <a:effectLst/>
                 <a:latin typeface="Microsoft JhengHei" panose="020B0604030504040204" pitchFamily="34" charset="-120"/>
                 <a:ea typeface="Microsoft JhengHei" panose="020B0604030504040204" pitchFamily="34" charset="-120"/>
               </a:rPr>
-              <a:t>正</a:t>
+              <a:t>正歌</a:t>
             </a:r>
             <a:r>
               <a:rPr lang="en-US" sz="3200" b="1" dirty="0">
                 <a:solidFill>
                   <a:srgbClr val="660033"/>
                 </a:solidFill>
+                <a:effectLst/>
                 <a:latin typeface="Microsoft JhengHei" panose="020B0604030504040204" pitchFamily="34" charset="-120"/>
                 <a:ea typeface="Microsoft JhengHei" panose="020B0604030504040204" pitchFamily="34" charset="-120"/>
               </a:rPr>
-              <a:t> </a:t>
-            </a:r>
-            <a:r>
-              <a:rPr lang="en-US" sz="3200" b="1" dirty="0">
-                <a:solidFill>
-                  <a:srgbClr val="660033"/>
-                </a:solidFill>
-                <a:latin typeface="Microsoft JhengHei" panose="020B0604030504040204" pitchFamily="34" charset="-120"/>
-                <a:ea typeface="Microsoft JhengHei" panose="020B0604030504040204" pitchFamily="34" charset="-120"/>
-              </a:rPr>
-              <a:t>)</a:t>
+              <a:t> )</a:t>
             </a:r>
             <a:endParaRPr lang="vi-VN" sz="3200" b="1" dirty="0">
               <a:solidFill>
                 <a:srgbClr val="660033"/>
               </a:solidFill>
-              <a:latin typeface="Microsoft JhengHei" panose="020B0604030504040204" pitchFamily="34" charset="-120"/>
+              <a:effectLst/>
               <a:ea typeface="Microsoft JhengHei" panose="020B0604030504040204" pitchFamily="34" charset="-120"/>
             </a:endParaRPr>
           </a:p>
@@ -3605,20 +3558,10 @@
                 <a:latin typeface="微軟正黑體" pitchFamily="34" charset="-120"/>
                 <a:ea typeface="微軟正黑體" pitchFamily="34" charset="-120"/>
               </a:rPr>
-              <a:t>在世間  能</a:t>
-            </a:r>
-            <a:r>
-              <a:rPr lang="zh-TW" altLang="en-US" sz="6600" b="1" dirty="0" smtClean="0">
-                <a:solidFill>
-                  <a:srgbClr val="660033"/>
-                </a:solidFill>
-                <a:latin typeface="微軟正黑體" pitchFamily="34" charset="-120"/>
-                <a:ea typeface="微軟正黑體" pitchFamily="34" charset="-120"/>
-              </a:rPr>
-              <a:t>遇</a:t>
-            </a:r>
-            <a:r>
-              <a:rPr lang="zh-CN" altLang="en-US" sz="6600" b="1" dirty="0" smtClean="0">
+              <a:t>在世間  能遇</a:t>
+            </a:r>
+            <a:r>
+              <a:rPr lang="zh-CN" altLang="en-US" sz="6600" b="1" dirty="0">
                 <a:solidFill>
                   <a:srgbClr val="660033"/>
                 </a:solidFill>
@@ -3687,6 +3630,7 @@
                 <a:solidFill>
                   <a:srgbClr val="660033"/>
                 </a:solidFill>
+                <a:effectLst/>
                 <a:latin typeface="Microsoft JhengHei" panose="020B0604030504040204" pitchFamily="34" charset="-120"/>
                 <a:ea typeface="Microsoft JhengHei" panose="020B0604030504040204" pitchFamily="34" charset="-120"/>
               </a:rPr>
@@ -3697,36 +3641,28 @@
                 <a:solidFill>
                   <a:srgbClr val="660033"/>
                 </a:solidFill>
+                <a:effectLst/>
                 <a:latin typeface="Microsoft JhengHei" panose="020B0604030504040204" pitchFamily="34" charset="-120"/>
                 <a:ea typeface="Microsoft JhengHei" panose="020B0604030504040204" pitchFamily="34" charset="-120"/>
               </a:rPr>
-              <a:t>正</a:t>
+              <a:t>正歌</a:t>
             </a:r>
             <a:r>
               <a:rPr lang="en-US" sz="3200" b="1" dirty="0">
                 <a:solidFill>
                   <a:srgbClr val="660033"/>
                 </a:solidFill>
+                <a:effectLst/>
                 <a:latin typeface="Microsoft JhengHei" panose="020B0604030504040204" pitchFamily="34" charset="-120"/>
                 <a:ea typeface="Microsoft JhengHei" panose="020B0604030504040204" pitchFamily="34" charset="-120"/>
               </a:rPr>
-              <a:t> </a:t>
-            </a:r>
-            <a:r>
-              <a:rPr lang="en-US" sz="3200" b="1" dirty="0">
-                <a:solidFill>
-                  <a:srgbClr val="660033"/>
-                </a:solidFill>
-                <a:latin typeface="Microsoft JhengHei" panose="020B0604030504040204" pitchFamily="34" charset="-120"/>
-                <a:ea typeface="Microsoft JhengHei" panose="020B0604030504040204" pitchFamily="34" charset="-120"/>
-              </a:rPr>
-              <a:t>)</a:t>
+              <a:t> )</a:t>
             </a:r>
             <a:endParaRPr lang="vi-VN" sz="3200" b="1" dirty="0">
               <a:solidFill>
                 <a:srgbClr val="660033"/>
               </a:solidFill>
-              <a:latin typeface="Microsoft JhengHei" panose="020B0604030504040204" pitchFamily="34" charset="-120"/>
+              <a:effectLst/>
               <a:ea typeface="Microsoft JhengHei" panose="020B0604030504040204" pitchFamily="34" charset="-120"/>
             </a:endParaRPr>
           </a:p>
@@ -3810,7 +3746,7 @@
               <a:buNone/>
             </a:pPr>
             <a:r>
-              <a:rPr lang="zh-CN" altLang="en-US" sz="6600" b="1" dirty="0" smtClean="0">
+              <a:rPr lang="zh-CN" altLang="en-US" sz="6600" b="1" dirty="0">
                 <a:solidFill>
                   <a:srgbClr val="660033"/>
                 </a:solidFill>
@@ -3820,27 +3756,17 @@
               <a:t>祢</a:t>
             </a:r>
             <a:r>
-              <a:rPr lang="zh-TW" altLang="en-US" sz="6600" b="1" dirty="0" smtClean="0">
+              <a:rPr lang="zh-TW" altLang="en-US" sz="6600" b="1" dirty="0">
                 <a:solidFill>
                   <a:srgbClr val="660033"/>
                 </a:solidFill>
                 <a:latin typeface="微軟正黑體" pitchFamily="34" charset="-120"/>
                 <a:ea typeface="微軟正黑體" pitchFamily="34" charset="-120"/>
               </a:rPr>
-              <a:t>杖</a:t>
-            </a:r>
-            <a:r>
-              <a:rPr lang="zh-TW" altLang="en-US" sz="6600" b="1" dirty="0">
-                <a:solidFill>
-                  <a:srgbClr val="660033"/>
-                </a:solidFill>
-                <a:latin typeface="微軟正黑體" pitchFamily="34" charset="-120"/>
-                <a:ea typeface="微軟正黑體" pitchFamily="34" charset="-120"/>
-              </a:rPr>
-              <a:t>扶持  </a:t>
-            </a:r>
-            <a:r>
-              <a:rPr lang="zh-CN" altLang="en-US" sz="6600" b="1" dirty="0" smtClean="0">
+              <a:t>杖扶持  </a:t>
+            </a:r>
+            <a:r>
+              <a:rPr lang="zh-CN" altLang="en-US" sz="6600" b="1" dirty="0">
                 <a:solidFill>
                   <a:srgbClr val="660033"/>
                 </a:solidFill>
@@ -3850,24 +3776,14 @@
               <a:t>祢</a:t>
             </a:r>
             <a:r>
-              <a:rPr lang="zh-TW" altLang="en-US" sz="6600" b="1" dirty="0" smtClean="0">
+              <a:rPr lang="zh-TW" altLang="en-US" sz="6600" b="1" dirty="0">
                 <a:solidFill>
                   <a:srgbClr val="660033"/>
                 </a:solidFill>
                 <a:latin typeface="微軟正黑體" pitchFamily="34" charset="-120"/>
                 <a:ea typeface="微軟正黑體" pitchFamily="34" charset="-120"/>
               </a:rPr>
-              <a:t>竿</a:t>
-            </a:r>
-            <a:r>
-              <a:rPr lang="zh-TW" altLang="en-US" sz="6600" b="1" dirty="0">
-                <a:solidFill>
-                  <a:srgbClr val="660033"/>
-                </a:solidFill>
-                <a:latin typeface="微軟正黑體" pitchFamily="34" charset="-120"/>
-                <a:ea typeface="微軟正黑體" pitchFamily="34" charset="-120"/>
-              </a:rPr>
-              <a:t>引領</a:t>
+              <a:t>竿引領</a:t>
             </a:r>
           </a:p>
         </p:txBody>
@@ -3900,6 +3816,7 @@
                 <a:solidFill>
                   <a:srgbClr val="660033"/>
                 </a:solidFill>
+                <a:effectLst/>
                 <a:latin typeface="Microsoft JhengHei" panose="020B0604030504040204" pitchFamily="34" charset="-120"/>
                 <a:ea typeface="Microsoft JhengHei" panose="020B0604030504040204" pitchFamily="34" charset="-120"/>
               </a:rPr>
@@ -3910,36 +3827,28 @@
                 <a:solidFill>
                   <a:srgbClr val="660033"/>
                 </a:solidFill>
+                <a:effectLst/>
                 <a:latin typeface="Microsoft JhengHei" panose="020B0604030504040204" pitchFamily="34" charset="-120"/>
                 <a:ea typeface="Microsoft JhengHei" panose="020B0604030504040204" pitchFamily="34" charset="-120"/>
               </a:rPr>
-              <a:t>正</a:t>
+              <a:t>正歌</a:t>
             </a:r>
             <a:r>
               <a:rPr lang="en-US" sz="3200" b="1" dirty="0">
                 <a:solidFill>
                   <a:srgbClr val="660033"/>
                 </a:solidFill>
+                <a:effectLst/>
                 <a:latin typeface="Microsoft JhengHei" panose="020B0604030504040204" pitchFamily="34" charset="-120"/>
                 <a:ea typeface="Microsoft JhengHei" panose="020B0604030504040204" pitchFamily="34" charset="-120"/>
               </a:rPr>
-              <a:t> </a:t>
-            </a:r>
-            <a:r>
-              <a:rPr lang="en-US" sz="3200" b="1" dirty="0">
-                <a:solidFill>
-                  <a:srgbClr val="660033"/>
-                </a:solidFill>
-                <a:latin typeface="Microsoft JhengHei" panose="020B0604030504040204" pitchFamily="34" charset="-120"/>
-                <a:ea typeface="Microsoft JhengHei" panose="020B0604030504040204" pitchFamily="34" charset="-120"/>
-              </a:rPr>
-              <a:t>)</a:t>
+              <a:t> )</a:t>
             </a:r>
             <a:endParaRPr lang="vi-VN" sz="3200" b="1" dirty="0">
               <a:solidFill>
                 <a:srgbClr val="660033"/>
               </a:solidFill>
-              <a:latin typeface="Microsoft JhengHei" panose="020B0604030504040204" pitchFamily="34" charset="-120"/>
+              <a:effectLst/>
               <a:ea typeface="Microsoft JhengHei" panose="020B0604030504040204" pitchFamily="34" charset="-120"/>
             </a:endParaRPr>
           </a:p>
@@ -4008,20 +3917,10 @@
                 <a:latin typeface="微軟正黑體" pitchFamily="34" charset="-120"/>
                 <a:ea typeface="微軟正黑體" pitchFamily="34" charset="-120"/>
               </a:rPr>
-              <a:t>何時我跌倒  何</a:t>
-            </a:r>
-            <a:r>
-              <a:rPr lang="zh-TW" altLang="en-US" sz="6600" b="1" dirty="0" smtClean="0">
-                <a:solidFill>
-                  <a:srgbClr val="660033"/>
-                </a:solidFill>
-                <a:latin typeface="微軟正黑體" pitchFamily="34" charset="-120"/>
-                <a:ea typeface="微軟正黑體" pitchFamily="34" charset="-120"/>
-              </a:rPr>
-              <a:t>時</a:t>
-            </a:r>
-            <a:r>
-              <a:rPr lang="zh-CN" altLang="en-US" sz="6600" b="1" dirty="0" smtClean="0">
+              <a:t>何時我跌倒  何時</a:t>
+            </a:r>
+            <a:r>
+              <a:rPr lang="zh-CN" altLang="en-US" sz="6600" b="1" dirty="0">
                 <a:solidFill>
                   <a:srgbClr val="660033"/>
                 </a:solidFill>
@@ -4031,24 +3930,14 @@
               <a:t>祢</a:t>
             </a:r>
             <a:r>
-              <a:rPr lang="zh-TW" altLang="en-US" sz="6600" b="1" dirty="0" smtClean="0">
+              <a:rPr lang="zh-TW" altLang="en-US" sz="6600" b="1" dirty="0">
                 <a:solidFill>
                   <a:srgbClr val="660033"/>
                 </a:solidFill>
                 <a:latin typeface="微軟正黑體" pitchFamily="34" charset="-120"/>
                 <a:ea typeface="微軟正黑體" pitchFamily="34" charset="-120"/>
               </a:rPr>
-              <a:t>扶</a:t>
-            </a:r>
-            <a:r>
-              <a:rPr lang="zh-TW" altLang="en-US" sz="6600" b="1" dirty="0">
-                <a:solidFill>
-                  <a:srgbClr val="660033"/>
-                </a:solidFill>
-                <a:latin typeface="微軟正黑體" pitchFamily="34" charset="-120"/>
-                <a:ea typeface="微軟正黑體" pitchFamily="34" charset="-120"/>
-              </a:rPr>
-              <a:t>持</a:t>
+              <a:t>扶持</a:t>
             </a:r>
             <a:endParaRPr lang="en-US" altLang="zh-TW" sz="6600" b="1" dirty="0">
               <a:solidFill>
@@ -4073,7 +3962,7 @@
               <a:t>危難遇風雪  </a:t>
             </a:r>
             <a:r>
-              <a:rPr lang="zh-CN" altLang="en-US" sz="6600" b="1" dirty="0" smtClean="0">
+              <a:rPr lang="zh-CN" altLang="en-US" sz="6600" b="1" dirty="0">
                 <a:solidFill>
                   <a:srgbClr val="660033"/>
                 </a:solidFill>
@@ -4083,24 +3972,14 @@
               <a:t>祢</a:t>
             </a:r>
             <a:r>
-              <a:rPr lang="zh-TW" altLang="en-US" sz="6600" b="1" dirty="0" smtClean="0">
+              <a:rPr lang="zh-TW" altLang="en-US" sz="6600" b="1" dirty="0">
                 <a:solidFill>
                   <a:srgbClr val="660033"/>
                 </a:solidFill>
                 <a:latin typeface="微軟正黑體" pitchFamily="34" charset="-120"/>
                 <a:ea typeface="微軟正黑體" pitchFamily="34" charset="-120"/>
               </a:rPr>
-              <a:t>必</a:t>
-            </a:r>
-            <a:r>
-              <a:rPr lang="zh-TW" altLang="en-US" sz="6600" b="1" dirty="0">
-                <a:solidFill>
-                  <a:srgbClr val="660033"/>
-                </a:solidFill>
-                <a:latin typeface="微軟正黑體" pitchFamily="34" charset="-120"/>
-                <a:ea typeface="微軟正黑體" pitchFamily="34" charset="-120"/>
-              </a:rPr>
-              <a:t>庇佑</a:t>
+              <a:t>必庇佑</a:t>
             </a:r>
             <a:endParaRPr lang="en-US" altLang="zh-TW" sz="6600" b="1" dirty="0">
               <a:solidFill>
@@ -4153,7 +4032,7 @@
                 <a:latin typeface="Microsoft JhengHei" panose="020B0604030504040204" pitchFamily="34" charset="-120"/>
                 <a:ea typeface="Microsoft JhengHei" panose="020B0604030504040204" pitchFamily="34" charset="-120"/>
               </a:rPr>
-              <a:t>副</a:t>
+              <a:t>副歌</a:t>
             </a:r>
             <a:r>
               <a:rPr lang="en-US" sz="3200" b="1" dirty="0">
@@ -4163,17 +4042,7 @@
                 <a:latin typeface="Microsoft JhengHei" panose="020B0604030504040204" pitchFamily="34" charset="-120"/>
                 <a:ea typeface="Microsoft JhengHei" panose="020B0604030504040204" pitchFamily="34" charset="-120"/>
               </a:rPr>
-              <a:t> </a:t>
-            </a:r>
-            <a:r>
-              <a:rPr lang="en-US" sz="3200" b="1" dirty="0">
-                <a:solidFill>
-                  <a:srgbClr val="660033"/>
-                </a:solidFill>
-                <a:latin typeface="Microsoft JhengHei" panose="020B0604030504040204" pitchFamily="34" charset="-120"/>
-                <a:ea typeface="Microsoft JhengHei" panose="020B0604030504040204" pitchFamily="34" charset="-120"/>
-              </a:rPr>
-              <a:t>)</a:t>
+              <a:t> )</a:t>
             </a:r>
             <a:endParaRPr lang="vi-VN" sz="3200" b="1" dirty="0">
               <a:solidFill>
@@ -4248,20 +4117,10 @@
                 <a:latin typeface="微軟正黑體" pitchFamily="34" charset="-120"/>
                 <a:ea typeface="微軟正黑體" pitchFamily="34" charset="-120"/>
               </a:rPr>
-              <a:t>前途</a:t>
-            </a:r>
-            <a:r>
-              <a:rPr lang="zh-TW" altLang="en-US" sz="6600" b="1" dirty="0" smtClean="0">
-                <a:solidFill>
-                  <a:srgbClr val="660033"/>
-                </a:solidFill>
-                <a:latin typeface="微軟正黑體" pitchFamily="34" charset="-120"/>
-                <a:ea typeface="微軟正黑體" pitchFamily="34" charset="-120"/>
-              </a:rPr>
-              <a:t>在</a:t>
-            </a:r>
-            <a:r>
-              <a:rPr lang="zh-CN" altLang="en-US" sz="6600" b="1" dirty="0" smtClean="0">
+              <a:t>前途在</a:t>
+            </a:r>
+            <a:r>
+              <a:rPr lang="zh-CN" altLang="en-US" sz="6600" b="1" dirty="0">
                 <a:solidFill>
                   <a:srgbClr val="660033"/>
                 </a:solidFill>
@@ -4271,24 +4130,14 @@
               <a:t>祢</a:t>
             </a:r>
             <a:r>
-              <a:rPr lang="zh-TW" altLang="en-US" sz="6600" b="1" dirty="0" smtClean="0">
+              <a:rPr lang="zh-TW" altLang="en-US" sz="6600" b="1" dirty="0">
                 <a:solidFill>
                   <a:srgbClr val="660033"/>
                 </a:solidFill>
                 <a:latin typeface="微軟正黑體" pitchFamily="34" charset="-120"/>
                 <a:ea typeface="微軟正黑體" pitchFamily="34" charset="-120"/>
               </a:rPr>
-              <a:t>手  </a:t>
-            </a:r>
-            <a:r>
-              <a:rPr lang="zh-TW" altLang="en-US" sz="6600" b="1" dirty="0">
-                <a:solidFill>
-                  <a:srgbClr val="660033"/>
-                </a:solidFill>
-                <a:latin typeface="微軟正黑體" pitchFamily="34" charset="-120"/>
-                <a:ea typeface="微軟正黑體" pitchFamily="34" charset="-120"/>
-              </a:rPr>
-              <a:t>牽我到白頭</a:t>
+              <a:t>手  牽我到白頭</a:t>
             </a:r>
             <a:endParaRPr lang="en-US" altLang="zh-TW" sz="6600" b="1" dirty="0">
               <a:solidFill>
@@ -4310,20 +4159,10 @@
                 <a:latin typeface="微軟正黑體" pitchFamily="34" charset="-120"/>
                 <a:ea typeface="微軟正黑體" pitchFamily="34" charset="-120"/>
               </a:rPr>
-              <a:t>守護我  從今天</a:t>
-            </a:r>
-            <a:r>
-              <a:rPr lang="zh-TW" altLang="en-US" sz="6600" b="1" dirty="0" smtClean="0">
-                <a:solidFill>
-                  <a:srgbClr val="660033"/>
-                </a:solidFill>
-                <a:latin typeface="微軟正黑體" pitchFamily="34" charset="-120"/>
-                <a:ea typeface="微軟正黑體" pitchFamily="34" charset="-120"/>
-              </a:rPr>
-              <a:t>起</a:t>
-            </a:r>
-            <a:r>
-              <a:rPr lang="en-US" altLang="zh-TW" sz="6600" b="1" dirty="0" smtClean="0">
+              <a:t>守護我  從今天起</a:t>
+            </a:r>
+            <a:r>
+              <a:rPr lang="en-US" altLang="zh-TW" sz="6600" b="1" dirty="0">
                 <a:solidFill>
                   <a:srgbClr val="660033"/>
                 </a:solidFill>
@@ -4333,24 +4172,14 @@
               <a:t>  </a:t>
             </a:r>
             <a:r>
-              <a:rPr lang="zh-TW" altLang="en-US" sz="6600" b="1" dirty="0" smtClean="0">
+              <a:rPr lang="zh-TW" altLang="en-US" sz="6600" b="1" dirty="0">
                 <a:solidFill>
                   <a:srgbClr val="660033"/>
                 </a:solidFill>
                 <a:latin typeface="微軟正黑體" pitchFamily="34" charset="-120"/>
                 <a:ea typeface="微軟正黑體" pitchFamily="34" charset="-120"/>
               </a:rPr>
-              <a:t>直</a:t>
-            </a:r>
-            <a:r>
-              <a:rPr lang="zh-TW" altLang="en-US" sz="6600" b="1" dirty="0">
-                <a:solidFill>
-                  <a:srgbClr val="660033"/>
-                </a:solidFill>
-                <a:latin typeface="微軟正黑體" pitchFamily="34" charset="-120"/>
-                <a:ea typeface="微軟正黑體" pitchFamily="34" charset="-120"/>
-              </a:rPr>
-              <a:t>到永遠</a:t>
+              <a:t>直到永遠</a:t>
             </a:r>
           </a:p>
         </p:txBody>
@@ -4396,7 +4225,7 @@
                 <a:latin typeface="Microsoft JhengHei" panose="020B0604030504040204" pitchFamily="34" charset="-120"/>
                 <a:ea typeface="Microsoft JhengHei" panose="020B0604030504040204" pitchFamily="34" charset="-120"/>
               </a:rPr>
-              <a:t>副</a:t>
+              <a:t>副歌</a:t>
             </a:r>
             <a:r>
               <a:rPr lang="en-US" sz="3200" b="1" dirty="0">
@@ -4406,17 +4235,7 @@
                 <a:latin typeface="Microsoft JhengHei" panose="020B0604030504040204" pitchFamily="34" charset="-120"/>
                 <a:ea typeface="Microsoft JhengHei" panose="020B0604030504040204" pitchFamily="34" charset="-120"/>
               </a:rPr>
-              <a:t> </a:t>
-            </a:r>
-            <a:r>
-              <a:rPr lang="en-US" sz="3200" b="1" dirty="0">
-                <a:solidFill>
-                  <a:srgbClr val="660033"/>
-                </a:solidFill>
-                <a:latin typeface="Microsoft JhengHei" panose="020B0604030504040204" pitchFamily="34" charset="-120"/>
-                <a:ea typeface="Microsoft JhengHei" panose="020B0604030504040204" pitchFamily="34" charset="-120"/>
-              </a:rPr>
-              <a:t>)</a:t>
+              <a:t> )</a:t>
             </a:r>
             <a:endParaRPr lang="vi-VN" sz="3200" b="1" dirty="0">
               <a:solidFill>
